--- a/HPRTAS - Five Executable Processes.pptx
+++ b/HPRTAS - Five Executable Processes.pptx
@@ -6399,7 +6399,7 @@
                 </a:solidFill>
                 <a:latin typeface="Segoe UI"/>
               </a:rPr>
-              <a:t>Each criterion is measurable because it states the condition to be met, and because it is linked to the requirement and the business rule it comes from. The scenarios beside it are the ones that measure it, and the result is the one recorded in the test plan's execution record at this commit.</a:t>
+              <a:t>Each criterion is measurable because it states the condition to be met, and because it is linked to the requirement and the business rule it comes from. The scenarios beside it are the ones that measure it, and the result is the one recorded in the test plan's execution record at this version.</a:t>
             </a:r>
           </a:p>
         </p:txBody>
@@ -7550,7 +7550,7 @@
                 </a:solidFill>
                 <a:latin typeface="Segoe UI"/>
               </a:rPr>
-              <a:t>Recorded at this commit: 19 of the 21 scenarios have a result - 12 pass and 7 pass in part; TC-13 and TC-16 have not been run. Eight criteria have a fully passing result: AC-01 to AC-05, AC-08, AC-09 and AC-10. Not demonstrated at this version: no authentication, no enforced role separation and no audit trail (DEF-07), and no form submitted by a signed-in user (DEF-08).</a:t>
+              <a:t>Recorded at tag submission-2026-09-29: 19 of the 21 scenarios have a result - 12 pass, 7 pass in part; TC-13 and TC-16 have never been run. 8 of the ten criteria have a fully passing result: AC-01, AC-02, AC-03, AC-04, AC-05, AC-08, AC-09 and AC-10. Not demonstrated at this version: no authentication, no enforced role separation and no audit trail (DEF-07), and no form submitted by a signed-in user (DEF-08).</a:t>
             </a:r>
           </a:p>
         </p:txBody>
